--- a/presentation/praesentation_amy_williams.pptx
+++ b/presentation/praesentation_amy_williams.pptx
@@ -513,7 +513,23 @@
           <a:lstStyle/>
           <a:p>
             <a:r>
-              <a:t>Begrüßung. Ziel: In 10 Minuten zeigen, wann Sie Ihre zentralen Häuser am besten verkaufen, ob sich eine Renovierung lohnt und wo Sie am Stadtrand günstig und unauffällig kaufen.</a:t>
+              <a:t>Zeit: 0:30</a:t>
+            </a:r>
+          </a:p>
+          <a:p/>
+          <a:p>
+            <a:r>
+              <a:t>• Begrüßung: „Frau Williams, schön, dass Sie da sind.“</a:t>
+            </a:r>
+          </a:p>
+          <a:p>
+            <a:r>
+              <a:t>• Ziel: In 10 Minuten zeigen, wann Sie Ihre Häuser im Zentrum am besten verkaufen, ob sich eine Renovierung lohnt und wo Sie am Stadtrand günstig und unauffällig wohnen können.</a:t>
+            </a:r>
+          </a:p>
+          <a:p>
+            <a:r>
+              <a:t>• Grundlage: echte Verkaufsdaten aus King County, also Seattle und Umgebung.</a:t>
             </a:r>
           </a:p>
         </p:txBody>
@@ -583,7 +599,38 @@
           <a:lstStyle/>
           <a:p>
             <a:r>
-              <a:t>Zusammenfassung als Handlungsplan: Verkaufen – nicht renovieren – im Winter kaufen – in den richtigen Orten kaufen.</a:t>
+              <a:t>Zeit: 1:15</a:t>
+            </a:r>
+          </a:p>
+          <a:p/>
+          <a:p>
+            <a:r>
+              <a:t>• KERNFOLIE – langsam vortragen.</a:t>
+            </a:r>
+          </a:p>
+          <a:p>
+            <a:r>
+              <a:t>• 1. Herbst meiden: Verkaufen Sie Ihre Top-Häuser im Winter oder Frühling.</a:t>
+            </a:r>
+          </a:p>
+          <a:p>
+            <a:r>
+              <a:t>• 2. Nicht renovieren: In Ihrem Segment bringt eine Renovierung nichts Messbares.</a:t>
+            </a:r>
+          </a:p>
+          <a:p>
+            <a:r>
+              <a:t>• 3. Im Winter kaufen: Am Stadtrand sparen Sie so etwa 8 %.</a:t>
+            </a:r>
+          </a:p>
+          <a:p>
+            <a:r>
+              <a:t>• 4. Snoqualmie und Duvall: Dort fallen Sie am wenigsten auf. Für mehr Auswahl: Maple Valley.</a:t>
+            </a:r>
+          </a:p>
+          <a:p>
+            <a:r>
+              <a:t>• Verbinden: „Verkaufen Sie gestaffelt im Winter und Frühling, und kaufen Sie im Winter am Stadtrand. So passt beides zeitlich zusammen.“</a:t>
             </a:r>
           </a:p>
         </p:txBody>
@@ -653,7 +700,59 @@
           <a:lstStyle/>
           <a:p>
             <a:r>
-              <a:t>Ehrlich bleiben: Die Empfehlungen beruhen auf einem Jahr Daten und auf Zusammenhängen, nicht auf Ursachen.</a:t>
+              <a:t>Zeit: 0:30</a:t>
+            </a:r>
+          </a:p>
+          <a:p/>
+          <a:p>
+            <a:r>
+              <a:t>• Die Daten umfassen nur ein Jahr. Ob sich das Muster jedes Jahr wiederholt, wissen wir nicht sicher.</a:t>
+            </a:r>
+          </a:p>
+          <a:p>
+            <a:r>
+              <a:t>• Wir sehen Zusammenhänge, keine Ursachen.</a:t>
+            </a:r>
+          </a:p>
+          <a:p>
+            <a:r>
+              <a:t>• Renovierungskosten und Verkaufsdauer fehlen in den Daten.</a:t>
+            </a:r>
+          </a:p>
+          <a:p>
+            <a:r>
+              <a:t>• „Unauffällig“ ist unsere Definition, kein Merkmal der Daten.</a:t>
+            </a:r>
+          </a:p>
+          <a:p>
+            <a:r>
+              <a:t>• Abschluss: „Vielen Dank, ich freue mich auf Ihre Fragen.“</a:t>
+            </a:r>
+          </a:p>
+          <a:p/>
+          <a:p>
+            <a:r>
+              <a:t>Mögliche Fragen:</a:t>
+            </a:r>
+          </a:p>
+          <a:p>
+            <a:r>
+              <a:t>• „Gilt das auch für dieses Jahr?“ → Daten von 2014/15; Muster plausibel, sollte aber mit aktuellen Daten geprüft werden.</a:t>
+            </a:r>
+          </a:p>
+          <a:p>
+            <a:r>
+              <a:t>• „Wie viele Häuser kann ich gleichzeitig verkaufen?“ → 940 Top-Verkäufe im Zentrum pro Jahr; mehrere Häuser über Winter und Frühling verteilt sind realistisch.</a:t>
+            </a:r>
+          </a:p>
+          <a:p>
+            <a:r>
+              <a:t>• „Warum nicht einfach ganz weit raus?“ → Günstiger ja, aber nicht automatisch unauffälliger; der Ort entscheidet.</a:t>
+            </a:r>
+          </a:p>
+          <a:p>
+            <a:r>
+              <a:t>• „Lohnt sich Renovierung bei den Häusern, die ich kaufe?“ → Ab Bauqualität 7 gab es einen Aufpreis, die Kosten kennen wir aber nicht.</a:t>
             </a:r>
           </a:p>
         </p:txBody>
@@ -723,7 +822,23 @@
           <a:lstStyle/>
           <a:p>
             <a:r>
-              <a:t>Zusatzerkenntnis aus der Analyse: 176 Häuser wurden innerhalb eines Jahres zweimal verkauft – meist ältere, günstige Häuser mit großem Preissprung. Typisch für Renovierungsobjekte, die Daten belegen die Renovierung aber nicht.</a:t>
+              <a:t>Zeit: nur bei Nachfragen</a:t>
+            </a:r>
+          </a:p>
+          <a:p/>
+          <a:p>
+            <a:r>
+              <a:t>• Zeigen, wenn Fragen zu Investitionen oder Renovierung kommen.</a:t>
+            </a:r>
+          </a:p>
+          <a:p>
+            <a:r>
+              <a:t>• 176 Häuser wurden innerhalb eines Jahres zweimal verkauft. Ihr Preis stieg im Median um 54 %, der Markt nur um 3 %.</a:t>
+            </a:r>
+          </a:p>
+          <a:p>
+            <a:r>
+              <a:t>• Das waren meist ältere, günstige Häuser, typisch für Renovierungsobjekte. Ob dort wirklich renoviert wurde, zeigen die Daten allerdings nicht.</a:t>
             </a:r>
           </a:p>
         </p:txBody>
@@ -793,7 +908,23 @@
           <a:lstStyle/>
           <a:p>
             <a:r>
-              <a:t>Amy verkauft nach und nach mehrere teure Häuser im Zentrum (Top 10 %) und braucht im Gegenzug durchschnittliche Häuser am Stadtrand, in denen sie nicht auffällt. Daraus ergeben sich drei Fragen.</a:t>
+              <a:t>Zeit: 0:45</a:t>
+            </a:r>
+          </a:p>
+          <a:p/>
+          <a:p>
+            <a:r>
+              <a:t>• Ihre Situation: Sie verkaufen nach und nach mehrere teure Häuser im Zentrum und brauchen gleichzeitig unauffällige Häuser am Stadtrand.</a:t>
+            </a:r>
+          </a:p>
+          <a:p>
+            <a:r>
+              <a:t>• Daraus ergeben sich drei Fragen: Wann verkaufen? Renovieren oder nicht? Wo und wann kaufen?</a:t>
+            </a:r>
+          </a:p>
+          <a:p>
+            <a:r>
+              <a:t>• Überleitung: „Bevor ich die Antworten zeige, kurz zur Datenbasis.“</a:t>
             </a:r>
           </a:p>
         </p:txBody>
@@ -863,7 +994,28 @@
           <a:lstStyle/>
           <a:p>
             <a:r>
-              <a:t>Kurz erklären, worauf die Aussagen beruhen. Die Definitionen sind unsere Annahmen – wichtig, weil Begriffe wie 'zentral' oder 'unauffällig' nicht in den Daten stehen.</a:t>
+              <a:t>Zeit: 0:45</a:t>
+            </a:r>
+          </a:p>
+          <a:p/>
+          <a:p>
+            <a:r>
+              <a:t>• Rund 21.600 Hausverkäufe über ein Jahr, von Mai 2014 bis Mai 2015.</a:t>
+            </a:r>
+          </a:p>
+          <a:p>
+            <a:r>
+              <a:t>• Wir vergleichen den Preis pro m². So sind große und kleine Häuser fair vergleichbar.</a:t>
+            </a:r>
+          </a:p>
+          <a:p>
+            <a:r>
+              <a:t>• Definitionen: „zentral“ heißt bis etwa 10 km von Downtown, „Randlage“ ab etwa 25 km, „Top-Häuser“ sind die teuersten 10 %.</a:t>
+            </a:r>
+          </a:p>
+          <a:p>
+            <a:r>
+              <a:t>• „Unauffällig“ heißt für uns: ein ganz normales Haus, ohne Wasserlage, ohne besondere Aussicht, mit mittlerem Preis und mittlerer Größe.</a:t>
             </a:r>
           </a:p>
         </p:txBody>
@@ -933,7 +1085,23 @@
           <a:lstStyle/>
           <a:p>
             <a:r>
-              <a:t>Jede Hypothese stimmt nur zum Teil – und genau die Unterschiede sind für Amy wichtig. Details auf den nächsten Folien.</a:t>
+              <a:t>Zeit: 0:45</a:t>
+            </a:r>
+          </a:p>
+          <a:p/>
+          <a:p>
+            <a:r>
+              <a:t>• Wir sind mit drei Vermutungen gestartet: Frühling ist gut für den Verkauf, Renovieren bringt mehr Geld, weiter draußen ist es günstiger und unauffälliger.</a:t>
+            </a:r>
+          </a:p>
+          <a:p>
+            <a:r>
+              <a:t>• Ehrliches Ergebnis: Alle drei stimmen nur teilweise.</a:t>
+            </a:r>
+          </a:p>
+          <a:p>
+            <a:r>
+              <a:t>• Für Sie interessant sind gerade die Unterschiede. Überleitung: „Fangen wir mit dem Timing an.“</a:t>
             </a:r>
           </a:p>
         </p:txBody>
@@ -1003,7 +1171,28 @@
           <a:lstStyle/>
           <a:p>
             <a:r>
-              <a:t>Über alle Häuser gesehen steigen die Preise im Frühling deutlich. Der Unterschied ist klein, aber stabil – und er betrifft vor allem Durchschnittshäuser, also genau die Häuser, die Amy kaufen will.</a:t>
+              <a:t>Zeit: 1:00</a:t>
+            </a:r>
+          </a:p>
+          <a:p/>
+          <a:p>
+            <a:r>
+              <a:t>• Kurve erklären: Jeder Punkt ist der typische Preis pro m² in einem Monat.</a:t>
+            </a:r>
+          </a:p>
+          <a:p>
+            <a:r>
+              <a:t>• Höchster Wert im April, niedrigster im Dezember. Der Frühling liegt etwa 8 % über dem Winter.</a:t>
+            </a:r>
+          </a:p>
+          <a:p>
+            <a:r>
+              <a:t>• Im Frühling gibt es fast doppelt so viele Verkäufe wie im Winter. Wer im Winter kauft, hat also weniger Konkurrenz.</a:t>
+            </a:r>
+          </a:p>
+          <a:p>
+            <a:r>
+              <a:t>• Überleitung: „Das gilt für den Gesamtmarkt. Für Ihre Häuser sieht es aber anders aus.“</a:t>
             </a:r>
           </a:p>
         </p:txBody>
@@ -1073,7 +1262,33 @@
           <a:lstStyle/>
           <a:p>
             <a:r>
-              <a:t>Wichtigste Erkenntnis zum Timing: Bei den teuren Häusern im Zentrum gibt es keinen Frühlingsbonus – nur der Herbst ist schwächer. Beim Kauf am Stadtrand spart Amy im Winter rund 8 %.</a:t>
+              <a:t>Zeit: 1:00</a:t>
+            </a:r>
+          </a:p>
+          <a:p/>
+          <a:p>
+            <a:r>
+              <a:t>• KERNFOLIE – kurz Pause machen.</a:t>
+            </a:r>
+          </a:p>
+          <a:p>
+            <a:r>
+              <a:t>• Links, Ihre Top-Häuser im Zentrum: Es gibt keinen Frühlingsbonus. Winter und Frühling liegen gleichauf, nur im Herbst erzielen Sie etwa 7 % weniger.</a:t>
+            </a:r>
+          </a:p>
+          <a:p>
+            <a:r>
+              <a:t>• Bei teuren Häusern in Top-Lage zählt die Lage, nicht die Jahreszeit.</a:t>
+            </a:r>
+          </a:p>
+          <a:p>
+            <a:r>
+              <a:t>• Rechts, die Häuser, die Sie kaufen wollen: Im Winter sind sie etwa 8 % günstiger, also rund 366.000 $ statt 400.000 $.</a:t>
+            </a:r>
+          </a:p>
+          <a:p>
+            <a:r>
+              <a:t>• Kernaussage: „Verkaufen Sie nicht im Herbst, und kaufen Sie im Winter.“</a:t>
             </a:r>
           </a:p>
         </p:txBody>
@@ -1143,7 +1358,33 @@
           <a:lstStyle/>
           <a:p>
             <a:r>
-              <a:t>Links: Je höher die Bauqualität (Grade), desto größer der Preisvorteil renovierter Häuser. Rechts: Bei Amys Häusern – Top 10 % im Zentrum – bestimmt die Lage den Preis, eine Renovierung bringt keinen messbaren Aufpreis. Kosten der Renovierung kennen wir nicht.</a:t>
+              <a:t>Zeit: 1:00</a:t>
+            </a:r>
+          </a:p>
+          <a:p/>
+          <a:p>
+            <a:r>
+              <a:t>• Links: Je besser die Bauqualität, desto mehr bringt eine Renovierung, von etwa +20 % bis +67 % pro m².</a:t>
+            </a:r>
+          </a:p>
+          <a:p>
+            <a:r>
+              <a:t>• Rechts, Ihr Segment: Renovierte und nicht renovierte Top-Häuser im Zentrum kosten praktisch gleich viel, 4.610 $ gegenüber 4.558 $ pro m².</a:t>
+            </a:r>
+          </a:p>
+          <a:p>
+            <a:r>
+              <a:t>• Der Grund: Bei Ihren Häusern bestimmt die Lage den Preis.</a:t>
+            </a:r>
+          </a:p>
+          <a:p>
+            <a:r>
+              <a:t>• Empfehlung: Das Geld für eine Renovierung können Sie sich sparen.</a:t>
+            </a:r>
+          </a:p>
+          <a:p>
+            <a:r>
+              <a:t>• Einschränkung: Was eine Renovierung kostet, zeigen die Daten nicht.</a:t>
             </a:r>
           </a:p>
         </p:txBody>
@@ -1213,7 +1454,28 @@
           <a:lstStyle/>
           <a:p>
             <a:r>
-              <a:t>Stärkster Zusammenhang der ganzen Analyse. Der Preis pro m² fällt mit der Entfernung, im Norden wie im Süden. Der Süden ist auf gleicher Entfernung grundsätzlich günstiger.</a:t>
+              <a:t>Zeit: 0:45</a:t>
+            </a:r>
+          </a:p>
+          <a:p/>
+          <a:p>
+            <a:r>
+              <a:t>• Das ist der stärkste Zusammenhang der ganzen Analyse.</a:t>
+            </a:r>
+          </a:p>
+          <a:p>
+            <a:r>
+              <a:t>• Je weiter weg vom Zentrum, desto günstiger: von rund 3.700 $ auf rund 1.850 $ pro m², also etwa die Hälfte.</a:t>
+            </a:r>
+          </a:p>
+          <a:p>
+            <a:r>
+              <a:t>• Das gilt im Norden und im Süden, der Süden ist aber bei gleicher Entfernung günstiger.</a:t>
+            </a:r>
+          </a:p>
+          <a:p>
+            <a:r>
+              <a:t>• Überleitung: „Günstig ist also klar. Aber wo fallen Sie nicht auf?“</a:t>
             </a:r>
           </a:p>
         </p:txBody>
@@ -1283,7 +1545,28 @@
           <a:lstStyle/>
           <a:p>
             <a:r>
-              <a:t>Am Stadtrand insgesamt sind Durchschnittshäuser nicht häufiger als anderswo (ca. 19 %). In einigen Orten aber schon: In Snoqualmie und Duvall ist mehr als jedes dritte Haus ein Durchschnittshaus – dort fällt Amy nicht auf. Maple Valley hat die größte Auswahl.</a:t>
+              <a:t>Zeit: 1:00</a:t>
+            </a:r>
+          </a:p>
+          <a:p/>
+          <a:p>
+            <a:r>
+              <a:t>• Karte erklären: Der Stern ist Downtown Seattle, die blauen Punkte sind Durchschnittshäuser am Stadtrand.</a:t>
+            </a:r>
+          </a:p>
+          <a:p>
+            <a:r>
+              <a:t>• Überraschung: Am Stadtrand insgesamt gibt es nicht mehr Durchschnittshäuser als anderswo, nur etwa 19 %. Weit draußen allein macht Sie also nicht unauffällig.</a:t>
+            </a:r>
+          </a:p>
+          <a:p>
+            <a:r>
+              <a:t>• Es kommt auf den Ort an: In Snoqualmie und Duvall sind über 40 % der Häuser Durchschnittshäuser. Dort fallen Sie in der Masse nicht auf.</a:t>
+            </a:r>
+          </a:p>
+          <a:p>
+            <a:r>
+              <a:t>• Maple Valley hat die meisten passenden Häuser, also die größte Auswahl.</a:t>
             </a:r>
           </a:p>
         </p:txBody>
